--- a/pptx-asset-library/decks/01_tables/TBL_bulk_budget_v1.pptx
+++ b/pptx-asset-library/decks/01_tables/TBL_bulk_budget_v1.pptx
@@ -3185,7 +3185,7 @@
           <a:graphicData uri="http://schemas.openxmlformats.org/drawingml/2006/table">
             <a:tbl>
               <a:tblPr>
-                <a:tableStyleId>{2D5ABB26-0587-4C30-8999-92F81FD0307C}</a:tableStyleId>
+                <a:tableStyleId>{5C22544A-7EE6-4342-B048-85BDC9FD1C3A}</a:tableStyleId>
               </a:tblPr>
               <a:tblGrid>
                 <a:gridCol w="3044952"/>
@@ -4705,7 +4705,7 @@
           <a:graphicData uri="http://schemas.openxmlformats.org/drawingml/2006/table">
             <a:tbl>
               <a:tblPr>
-                <a:tableStyleId>{2D5ABB26-0587-4C30-8999-92F81FD0307C}</a:tableStyleId>
+                <a:tableStyleId>{5C22544A-7EE6-4342-B048-85BDC9FD1C3A}</a:tableStyleId>
               </a:tblPr>
               <a:tblGrid>
                 <a:gridCol w="3044952"/>
@@ -6452,7 +6452,7 @@
           <a:graphicData uri="http://schemas.openxmlformats.org/drawingml/2006/table">
             <a:tbl>
               <a:tblPr>
-                <a:tableStyleId>{2D5ABB26-0587-4C30-8999-92F81FD0307C}</a:tableStyleId>
+                <a:tableStyleId>{5C22544A-7EE6-4342-B048-85BDC9FD1C3A}</a:tableStyleId>
               </a:tblPr>
               <a:tblGrid>
                 <a:gridCol w="3044952"/>
@@ -7972,7 +7972,7 @@
           <a:graphicData uri="http://schemas.openxmlformats.org/drawingml/2006/table">
             <a:tbl>
               <a:tblPr>
-                <a:tableStyleId>{2D5ABB26-0587-4C30-8999-92F81FD0307C}</a:tableStyleId>
+                <a:tableStyleId>{5C22544A-7EE6-4342-B048-85BDC9FD1C3A}</a:tableStyleId>
               </a:tblPr>
               <a:tblGrid>
                 <a:gridCol w="3044952"/>
@@ -9719,7 +9719,7 @@
           <a:graphicData uri="http://schemas.openxmlformats.org/drawingml/2006/table">
             <a:tbl>
               <a:tblPr>
-                <a:tableStyleId>{2D5ABB26-0587-4C30-8999-92F81FD0307C}</a:tableStyleId>
+                <a:tableStyleId>{5C22544A-7EE6-4342-B048-85BDC9FD1C3A}</a:tableStyleId>
               </a:tblPr>
               <a:tblGrid>
                 <a:gridCol w="3044952"/>
@@ -11239,7 +11239,7 @@
           <a:graphicData uri="http://schemas.openxmlformats.org/drawingml/2006/table">
             <a:tbl>
               <a:tblPr>
-                <a:tableStyleId>{2D5ABB26-0587-4C30-8999-92F81FD0307C}</a:tableStyleId>
+                <a:tableStyleId>{5C22544A-7EE6-4342-B048-85BDC9FD1C3A}</a:tableStyleId>
               </a:tblPr>
               <a:tblGrid>
                 <a:gridCol w="3044952"/>
@@ -12986,7 +12986,7 @@
           <a:graphicData uri="http://schemas.openxmlformats.org/drawingml/2006/table">
             <a:tbl>
               <a:tblPr>
-                <a:tableStyleId>{2D5ABB26-0587-4C30-8999-92F81FD0307C}</a:tableStyleId>
+                <a:tableStyleId>{5C22544A-7EE6-4342-B048-85BDC9FD1C3A}</a:tableStyleId>
               </a:tblPr>
               <a:tblGrid>
                 <a:gridCol w="3044952"/>
@@ -14506,7 +14506,7 @@
           <a:graphicData uri="http://schemas.openxmlformats.org/drawingml/2006/table">
             <a:tbl>
               <a:tblPr>
-                <a:tableStyleId>{2D5ABB26-0587-4C30-8999-92F81FD0307C}</a:tableStyleId>
+                <a:tableStyleId>{5C22544A-7EE6-4342-B048-85BDC9FD1C3A}</a:tableStyleId>
               </a:tblPr>
               <a:tblGrid>
                 <a:gridCol w="3044952"/>
